--- a/A2A_Agent_to_Agent_Protocol.pptx
+++ b/A2A_Agent_to_Agent_Protocol.pptx
@@ -324,7 +324,10 @@
           <a:bodyPr/>
           <a:lstStyle/>
           <a:p>
-            <a:endParaRPr lang="en-US" dirty="0"/>
+            <a:r>
+              <a:rPr lang="en-US" dirty="0"/>
+              <a:t>The presentation must be recorded.</a:t>
+            </a:r>
           </a:p>
         </p:txBody>
       </p:sp>
@@ -387,12 +390,14 @@
           <a:p>
             <a:r>
               <a:rPr lang="en-US" dirty="0"/>
-              <a:t>When and where to use A2A. 
-Use A2A when the other agent does not live in your process. That includes another team in your company if they refuse to share their runtime. It also includes a vendor.
-Do not use A2A when you only need Postgres, a file folder, or a calculator you already run. That is MCP. MCP is closer, simpler, and should stay inside your network.
-Good places: an order that needs pricing, legal, and shipping. A trip. Two hospitals that must pass one record. Or an inside specialist that must stay locked, for example a tax engine that may not leave a secure room.
-You can use MCP and A2A together. MCP under your agent. A2A between agents.
-A common mistake: wrapping a foreign agent as a local MCP tool. That hides login and pulls too much context across the company line. Do not do that.</a:t>
+              <a:t>Six benefits. I will give one sentence for each.
+Work across teams. Your flight agent and their hotel agent do not need the same programming language.
+Less glue code. Without A2A, every new partner is a new project. With A2A, the partner publishes a card and you already know how to call it.
+Long jobs are normal. Booking a trip is not one click. A2A can stream status: still searching, need your passport number, done.
+Many kinds of content. Not only chat text. A form. A PDF. A table.
+Inner work stays home. This is a business benefit and a safety benefit. You do not hand over your secret process.
+Same safety steps. Your security team learns one pattern. They do not review a new private API every month.
+So again, A2A lets us work with agents we do not own, without opening our system.</a:t>
             </a:r>
           </a:p>
         </p:txBody>
@@ -414,7 +419,7 @@
           <a:p>
             <a:fld id="{F7021451-1387-4CA6-816F-3879F97B5CBC}" type="slidenum">
               <a:rPr lang="en-US"/>
-              <a:t>14</a:t>
+              <a:t>13</a:t>
             </a:fld>
             <a:endParaRPr lang="en-US"/>
           </a:p>
@@ -479,18 +484,12 @@
           <a:p>
             <a:r>
               <a:rPr lang="en-US" dirty="0"/>
-              <a:t>I created color-coded boxes here to separate things.</a:t>
-            </a:r>
-          </a:p>
-          <a:p>
-            <a:r>
-              <a:rPr lang="en-US" dirty="0"/>
-              <a:t>
-Yellow is data. It never crosses by default.
-Green is MCP. That is how an agent uses tools next to its own data. Each company has its own MCP layer. There is no arrow between the green boxes.
-Purple is A2A. That is the only layer that crosses the company line. Your agent sends a job. Their agent sends a result.
-If someone says we already have MCP so we do not need A2A, show this slide. MCP does not solve the crossing. A2A does not replace MCP. They stack.
-The crossing is also why login belongs in A2A. You are leaving your wall.</a:t>
+              <a:t>When and where to use A2A. 
+Use A2A when the other agent does not live in your process. That includes another team in your company if they refuse to share their runtime. It also includes a vendor.
+Do not use A2A when you only need Postgres, a file folder, or a calculator you already run. That is MCP. MCP is closer, simpler, and should stay inside your network.
+Good places: an order that needs pricing, legal, and shipping. A trip. Two hospitals that must pass one record. Or an inside specialist that must stay locked, for example a tax engine that may not leave a secure room.
+You can use MCP and A2A together. MCP under your agent. A2A between agents.
+A common mistake: wrapping a foreign agent as a local MCP tool. That hides login and pulls too much context across the company line. Do not do that.</a:t>
             </a:r>
           </a:p>
         </p:txBody>
@@ -512,7 +511,7 @@
           <a:p>
             <a:fld id="{F7021451-1387-4CA6-816F-3879F97B5CBC}" type="slidenum">
               <a:rPr lang="en-US"/>
-              <a:t>15</a:t>
+              <a:t>14</a:t>
             </a:fld>
             <a:endParaRPr lang="en-US"/>
           </a:p>
@@ -577,13 +576,18 @@
           <a:p>
             <a:r>
               <a:rPr lang="en-US" dirty="0"/>
-              <a:t>Four pieces on the top row. 
-Agent Card. A JSON file, often at slash dot well-known slash agent-card.json. It is a name tag and a shop sign. It lists skills and the login method. Do not put passwords in this file.
-Task. One unit of work. It has an id both companies can write in their logs. That id is how you debug later.
-Message. One turn. Role is user or agent. Inside a message you can put text, a file, or structured data.
-Result. The docs also say artifact. I will say result. It is the thing you wanted: a booked plan, a report, a table.
-Bottom row: life of a task. Submitted means they accepted the job. Working means they are busy. Needs input is important. That is how the other agent asks a question instead of guessing. Done means you can take the result. Failed means stop and read the error. There is also canceled, if someone stops the job.
-A very short answer can be only a message, with no task. A long job should always be a task so you can follow it.</a:t>
+              <a:t>I created color-coded boxes here to separate things.</a:t>
+            </a:r>
+          </a:p>
+          <a:p>
+            <a:r>
+              <a:rPr lang="en-US" dirty="0"/>
+              <a:t>
+Yellow is data. It never crosses by default.
+Green is MCP. That is how an agent uses tools next to its own data. Each company has its own MCP layer. There is no arrow between the green boxes.
+Purple is A2A. That is the only layer that crosses the company line. Your agent sends a job. Their agent sends a result.
+If someone says we already have MCP so we do not need A2A, show this slide. MCP does not solve the crossing. A2A does not replace MCP. They stack.
+The crossing is also why login belongs in A2A. You are leaving your wall.</a:t>
             </a:r>
           </a:p>
         </p:txBody>
@@ -605,7 +609,7 @@
           <a:p>
             <a:fld id="{F7021451-1387-4CA6-816F-3879F97B5CBC}" type="slidenum">
               <a:rPr lang="en-US"/>
-              <a:t>16</a:t>
+              <a:t>15</a:t>
             </a:fld>
             <a:endParaRPr lang="en-US"/>
           </a:p>
@@ -670,14 +674,13 @@
           <a:p>
             <a:r>
               <a:rPr lang="en-US" dirty="0"/>
-              <a:t>This is the path. I will walk it slowly.
-Step one, find. Your agent loads the Agent Card from a known web path, or from a private list your company keeps.
-Step two, log in. The card says how. Maybe OpenID. Maybe a bearer token. Maybe an API key. You get that proof from a login server, not from the card file. You send the proof in the HTTP header, not inside the job text.
-Step three, check rights. A valid login is not a free pass. Their server asks: may this caller start this skill? Read a price is not the same as pay a bill. If the answer is no, you get 401 or 403. Stop. Do not send the job.
-Step four, send work. You send a message. If the work is long, they create a task and you follow the task id.
-Step five, get the result. Status becomes done. You take the output. You do not take their inner steps.
-You can wait in three ways. One reply if the job is fast. Live updates if you keep a connection open. A later notice to a web address you give them, if you cannot stay connected.
-Three roles. The user sets the goal. Your agent is the client. Their agent is the server. Tomorrow the roles can flip. Then you must check their token the same way.</a:t>
+              <a:t>Four pieces on the top row. 
+Agent Card. A JSON file, often at slash dot well-known slash agent-card.json. It is a name tag and a shop sign. It lists skills and the login method. Do not put passwords in this file.
+Task. One unit of work. It has an id both companies can write in their logs. That id is how you debug later.
+Message. One turn. Role is user or agent. Inside a message you can put text, a file, or structured data.
+Result. The docs also say artifact. I will say result. It is the thing you wanted: a booked plan, a report, a table.
+Bottom row: life of a task. Submitted means they accepted the job. Working means they are busy. Needs input is important. That is how the other agent asks a question instead of guessing. Done means you can take the result. Failed means stop and read the error. There is also canceled, if someone stops the job.
+A very short answer can be only a message, with no task. A long job should always be a task so you can follow it.</a:t>
             </a:r>
           </a:p>
         </p:txBody>
@@ -699,7 +702,7 @@
           <a:p>
             <a:fld id="{F7021451-1387-4CA6-816F-3879F97B5CBC}" type="slidenum">
               <a:rPr lang="en-US"/>
-              <a:t>17</a:t>
+              <a:t>16</a:t>
             </a:fld>
             <a:endParaRPr lang="en-US"/>
           </a:p>
@@ -745,6 +748,100 @@
             <p:ph type="sldImg"/>
           </p:nvPr>
         </p:nvSpPr>
+        <p:spPr/>
+      </p:sp>
+      <p:sp>
+        <p:nvSpPr>
+          <p:cNvPr id="3" name="Notes Placeholder 2"/>
+          <p:cNvSpPr>
+            <a:spLocks noGrp="1"/>
+          </p:cNvSpPr>
+          <p:nvPr>
+            <p:ph type="body" idx="1"/>
+          </p:nvPr>
+        </p:nvSpPr>
+        <p:spPr/>
+        <p:txBody>
+          <a:bodyPr/>
+          <a:lstStyle/>
+          <a:p>
+            <a:r>
+              <a:rPr lang="en-US" dirty="0"/>
+              <a:t>This is the path. I will walk it slowly.
+Step one, find. Your agent loads the Agent Card from a known web path, or from a private list your company keeps.
+Step two, log in. The card says how. Maybe OpenID. Maybe a bearer token. Maybe an API key. You get that proof from a login server, not from the card file. You send the proof in the HTTP header, not inside the job text.
+Step three, check rights. A valid login is not a free pass. Their server asks: may this caller start this skill? Read a price is not the same as pay a bill. If the answer is no, you get 401 or 403. Stop. Do not send the job.
+Step four, send work. You send a message. If the work is long, they create a task and you follow the task id.
+Step five, get the result. Status becomes done. You take the output. You do not take their inner steps.
+You can wait in three ways. One reply if the job is fast. Live updates if you keep a connection open. A later notice to a web address you give them, if you cannot stay connected.
+Three roles. The user sets the goal. Your agent is the client. Their agent is the server. Tomorrow the roles can flip. Then you must check their token the same way.</a:t>
+            </a:r>
+          </a:p>
+        </p:txBody>
+      </p:sp>
+      <p:sp>
+        <p:nvSpPr>
+          <p:cNvPr id="4" name="Slide Number Placeholder 3"/>
+          <p:cNvSpPr>
+            <a:spLocks noGrp="1"/>
+          </p:cNvSpPr>
+          <p:nvPr>
+            <p:ph type="sldNum" sz="quarter" idx="10"/>
+          </p:nvPr>
+        </p:nvSpPr>
+        <p:spPr/>
+        <p:txBody>
+          <a:bodyPr/>
+          <a:lstStyle/>
+          <a:p>
+            <a:fld id="{F7021451-1387-4CA6-816F-3879F97B5CBC}" type="slidenum">
+              <a:rPr lang="en-US"/>
+              <a:t>17</a:t>
+            </a:fld>
+            <a:endParaRPr lang="en-US"/>
+          </a:p>
+        </p:txBody>
+      </p:sp>
+    </p:spTree>
+    <p:extLst>
+      <p:ext uri="{BB962C8B-B14F-4D97-AF65-F5344CB8AC3E}">
+        <p14:creationId xmlns:p14="http://schemas.microsoft.com/office/powerpoint/2010/main" val="1024086991"/>
+      </p:ext>
+    </p:extLst>
+  </p:cSld>
+  <p:clrMapOvr>
+    <a:masterClrMapping/>
+  </p:clrMapOvr>
+</p:notes>
+</file>
+
+<file path=ppt/notesSlides/notesSlide15.xml><?xml version="1.0" encoding="utf-8"?>
+<p:notes xmlns:a="http://schemas.openxmlformats.org/drawingml/2006/main" xmlns:r="http://schemas.openxmlformats.org/officeDocument/2006/relationships" xmlns:p="http://schemas.openxmlformats.org/presentationml/2006/main">
+  <p:cSld>
+    <p:spTree>
+      <p:nvGrpSpPr>
+        <p:cNvPr id="1" name=""/>
+        <p:cNvGrpSpPr/>
+        <p:nvPr/>
+      </p:nvGrpSpPr>
+      <p:grpSpPr>
+        <a:xfrm>
+          <a:off x="0" y="0"/>
+          <a:ext cx="0" cy="0"/>
+          <a:chOff x="0" y="0"/>
+          <a:chExt cx="0" cy="0"/>
+        </a:xfrm>
+      </p:grpSpPr>
+      <p:sp>
+        <p:nvSpPr>
+          <p:cNvPr id="2" name="Slide Image Placeholder 1"/>
+          <p:cNvSpPr>
+            <a:spLocks noGrp="1" noRot="1" noChangeAspect="1"/>
+          </p:cNvSpPr>
+          <p:nvPr>
+            <p:ph type="sldImg"/>
+          </p:nvPr>
+        </p:nvSpPr>
         <p:spPr>
           <a:xfrm>
             <a:off x="-228600" y="1524000"/>
@@ -822,7 +919,7 @@
 </p:notes>
 </file>
 
-<file path=ppt/notesSlides/notesSlide15.xml><?xml version="1.0" encoding="utf-8"?>
+<file path=ppt/notesSlides/notesSlide16.xml><?xml version="1.0" encoding="utf-8"?>
 <p:notes xmlns:a="http://schemas.openxmlformats.org/drawingml/2006/main" xmlns:r="http://schemas.openxmlformats.org/officeDocument/2006/relationships" xmlns:p="http://schemas.openxmlformats.org/presentationml/2006/main">
   <p:cSld>
     <p:spTree>
@@ -940,7 +1037,7 @@
 </p:notes>
 </file>
 
-<file path=ppt/notesSlides/notesSlide16.xml><?xml version="1.0" encoding="utf-8"?>
+<file path=ppt/notesSlides/notesSlide17.xml><?xml version="1.0" encoding="utf-8"?>
 <p:notes xmlns:a="http://schemas.openxmlformats.org/drawingml/2006/main" xmlns:r="http://schemas.openxmlformats.org/officeDocument/2006/relationships" xmlns:p="http://schemas.openxmlformats.org/presentationml/2006/main">
   <p:cSld>
     <p:spTree>
@@ -1033,7 +1130,7 @@
 </p:notes>
 </file>
 
-<file path=ppt/notesSlides/notesSlide17.xml><?xml version="1.0" encoding="utf-8"?>
+<file path=ppt/notesSlides/notesSlide18.xml><?xml version="1.0" encoding="utf-8"?>
 <p:notes xmlns:a="http://schemas.openxmlformats.org/drawingml/2006/main" xmlns:r="http://schemas.openxmlformats.org/officeDocument/2006/relationships" xmlns:p="http://schemas.openxmlformats.org/presentationml/2006/main">
   <p:cSld>
     <p:spTree>
@@ -1175,7 +1272,7 @@
               <a:t>Hello everyone. Thank you for coming. Today we will learn the Agent-to-Agent protocol. People also say A2A. It is not a product you buy from one vendor. It is a shared set of rules so one AI agent can work with another AI agent.
 Look at the five boxes at the bottom. That is the whole story of a call. Find the other agent. Log in. Send the job. Let it work. Take the result. We will come back to this path many times.
 Why does this matter now? Many teams already have an agent. The next problem is not one more model. The next problem is: how does my agent ask your agent for help when I cannot see your code, your tools, or your data? A2A is the answer we will study.
-I will speak in simple words. If a word on the slide is new, I will explain it when we get there. Please save questions for the end of each part, or write them down.</a:t>
+I will speak in simple words. If a word on the slide is new, I will explain it when we get there. Please save questions for the end of each part.</a:t>
             </a:r>
           </a:p>
         </p:txBody>
@@ -1262,7 +1359,15 @@
           <a:p>
             <a:r>
               <a:rPr lang="en-GB" dirty="0"/>
-              <a:t>It is more like a TL;DR of my talk in a university in Halden. Some important terminologies here, but we will focus on A2A… </a:t>
+              <a:t>It is more like a TL;DR of my talk in a university in Halden after the </a:t>
+            </a:r>
+            <a:r>
+              <a:rPr lang="en-GB" dirty="0" err="1"/>
+              <a:t>Fredrikstad</a:t>
+            </a:r>
+            <a:r>
+              <a:rPr lang="en-GB" dirty="0"/>
+              <a:t> city last month. Some important terminologies here, but we will focus on A2A… </a:t>
             </a:r>
             <a:r>
               <a:rPr lang="en-GB" dirty="0" err="1"/>
@@ -1276,7 +1381,7 @@
           <a:p>
             <a:r>
               <a:rPr lang="en-GB" dirty="0"/>
-              <a:t>MCP and A2A are external workflows. Let’s imagine each one of us has a software company….</a:t>
+              <a:t>MCP and A2A are external workflows. They are open protocols and specifications because we need to have an agreement where all of us can integrate securely and without reimplementing a new integration.</a:t>
             </a:r>
           </a:p>
           <a:p>
@@ -1394,14 +1499,13 @@
           <a:p>
             <a:r>
               <a:rPr lang="en-US" dirty="0"/>
-              <a:t>Here is the map of the short presentation. First I will say what A2A is, and I will also say what it is not, because people mix it with tools and with chat products.
+              <a:t>Here is the map of the short presentation. First, I will say what A2A is, and I will also say what it is not, because people mix it with tools and with chat products.
 Second, the problem. I will use a trip example. A user asks one assistant to plan a trip. That job needs other agents that the assistant does not own.
 Third, benefits and when to use it. A2A is not for every job. If you only need your own database, you do not need A2A.
 Fourth, the pieces: Agent Card, task, message, result. Then the five step path.
 Fifth, MCP. MCP is for tools inside your company. A2A is for agents you do not run.
 Sixth, login and permission. This part matters because the other agent often belongs to another company.
-Seventh, what you can. A card, a trusted list, one sample call.
-If we run short on time, we will not skip the path slide or the login slide.</a:t>
+Seventh, how to start a POC if you are wondering.</a:t>
             </a:r>
           </a:p>
         </p:txBody>
@@ -1602,14 +1706,14 @@
           <a:bodyPr/>
           <a:lstStyle/>
           <a:p>
-            <a:endParaRPr lang="en-US" dirty="0"/>
+            <a:endParaRPr lang="en-GB" dirty="0"/>
           </a:p>
         </p:txBody>
       </p:sp>
     </p:spTree>
     <p:extLst>
       <p:ext uri="{BB962C8B-B14F-4D97-AF65-F5344CB8AC3E}">
-        <p14:creationId xmlns:p14="http://schemas.microsoft.com/office/powerpoint/2010/main" val="1748047775"/>
+        <p14:creationId xmlns:p14="http://schemas.microsoft.com/office/powerpoint/2010/main" val="40758716"/>
       </p:ext>
     </p:extLst>
   </p:cSld>
@@ -1685,42 +1789,14 @@
           <a:bodyPr/>
           <a:lstStyle/>
           <a:p>
-            <a:r>
-              <a:rPr lang="en-US" sz="1200" b="0" i="0" kern="1200" dirty="0">
-                <a:solidFill>
-                  <a:schemeClr val="tx1"/>
-                </a:solidFill>
-                <a:effectLst/>
-                <a:latin typeface="+mn-lt"/>
-                <a:ea typeface="+mn-ea"/>
-                <a:cs typeface="+mn-cs"/>
-              </a:rPr>
-              <a:t>A call to your “work URL” looks like this shape.</a:t>
-            </a:r>
-          </a:p>
-          <a:p>
-            <a:br>
-              <a:rPr lang="en-US" dirty="0"/>
-            </a:br>
-            <a:r>
-              <a:rPr lang="en-US" sz="1200" b="0" i="0" kern="1200" dirty="0">
-                <a:solidFill>
-                  <a:schemeClr val="tx1"/>
-                </a:solidFill>
-                <a:effectLst/>
-                <a:latin typeface="+mn-lt"/>
-                <a:ea typeface="+mn-ea"/>
-                <a:cs typeface="+mn-cs"/>
-              </a:rPr>
-              <a:t>Your server answers with a task or a result. That reply is also JSON.</a:t>
-            </a:r>
+            <a:endParaRPr lang="en-US" dirty="0"/>
           </a:p>
         </p:txBody>
       </p:sp>
     </p:spTree>
     <p:extLst>
       <p:ext uri="{BB962C8B-B14F-4D97-AF65-F5344CB8AC3E}">
-        <p14:creationId xmlns:p14="http://schemas.microsoft.com/office/powerpoint/2010/main" val="2148728831"/>
+        <p14:creationId xmlns:p14="http://schemas.microsoft.com/office/powerpoint/2010/main" val="1748047775"/>
       </p:ext>
     </p:extLst>
   </p:cSld>
@@ -1757,7 +1833,21 @@
             <p:ph type="sldImg"/>
           </p:nvPr>
         </p:nvSpPr>
-        <p:spPr/>
+        <p:spPr>
+          <a:xfrm>
+            <a:off x="-228600" y="1524000"/>
+            <a:ext cx="7315200" cy="4114800"/>
+          </a:xfrm>
+          <a:prstGeom prst="rect">
+            <a:avLst/>
+          </a:prstGeom>
+          <a:noFill/>
+          <a:ln w="12700">
+            <a:solidFill>
+              <a:prstClr val="black"/>
+            </a:solidFill>
+          </a:ln>
+        </p:spPr>
       </p:sp>
       <p:sp>
         <p:nvSpPr>
@@ -1769,51 +1859,55 @@
             <p:ph type="body" idx="1"/>
           </p:nvPr>
         </p:nvSpPr>
-        <p:spPr/>
+        <p:spPr>
+          <a:xfrm>
+            <a:off x="685800" y="5867400"/>
+            <a:ext cx="5486400" cy="4800600"/>
+          </a:xfrm>
+          <a:prstGeom prst="rect">
+            <a:avLst/>
+          </a:prstGeom>
+        </p:spPr>
         <p:txBody>
           <a:bodyPr/>
           <a:lstStyle/>
           <a:p>
             <a:r>
+              <a:rPr lang="en-US" sz="1200" b="0" i="0" kern="1200" dirty="0">
+                <a:solidFill>
+                  <a:schemeClr val="tx1"/>
+                </a:solidFill>
+                <a:effectLst/>
+                <a:latin typeface="+mn-lt"/>
+                <a:ea typeface="+mn-ea"/>
+                <a:cs typeface="+mn-cs"/>
+              </a:rPr>
+              <a:t>A call to your “work URL” looks like this shape.</a:t>
+            </a:r>
+          </a:p>
+          <a:p>
+            <a:br>
               <a:rPr lang="en-US" dirty="0"/>
-              <a:t>This picture is the problem. The yellow box is your assistant. The user asked it to plan a trip. The assistant is good at talk, but it does not own flights, hotels, currency, or local tickets.
-Those four specialists live in other companies. They use other software. They have other rules. Today, with no shared standard, your team would build four private connections. Next year a fifth vendor appears, and you build again.
-Three extra problems hide here.
-First, people wrap an agent as a simple tool. A tool returns a number and stops. A real agent may need to ask: which dates? what budget? A tool cannot do that well.
-Second, custom links often skip login, or they put a password inside the message body. That is how leaks start.
-Third, there is no common job ticket. When something fails, your log and their log do not share an id. Nobody can find the same call.
-A2A exists to give those four boxes one shared path up to the assistant.</a:t>
-            </a:r>
-          </a:p>
-        </p:txBody>
-      </p:sp>
-      <p:sp>
-        <p:nvSpPr>
-          <p:cNvPr id="4" name="Slide Number Placeholder 3"/>
-          <p:cNvSpPr>
-            <a:spLocks noGrp="1"/>
-          </p:cNvSpPr>
-          <p:nvPr>
-            <p:ph type="sldNum" sz="quarter" idx="10"/>
-          </p:nvPr>
-        </p:nvSpPr>
-        <p:spPr/>
-        <p:txBody>
-          <a:bodyPr/>
-          <a:lstStyle/>
-          <a:p>
-            <a:fld id="{F7021451-1387-4CA6-816F-3879F97B5CBC}" type="slidenum">
-              <a:rPr lang="en-US"/>
-              <a:t>12</a:t>
-            </a:fld>
-            <a:endParaRPr lang="en-US"/>
+            </a:br>
+            <a:r>
+              <a:rPr lang="en-US" sz="1200" b="0" i="0" kern="1200" dirty="0">
+                <a:solidFill>
+                  <a:schemeClr val="tx1"/>
+                </a:solidFill>
+                <a:effectLst/>
+                <a:latin typeface="+mn-lt"/>
+                <a:ea typeface="+mn-ea"/>
+                <a:cs typeface="+mn-cs"/>
+              </a:rPr>
+              <a:t>Your server answers with a task or a result. That reply is also JSON.</a:t>
+            </a:r>
           </a:p>
         </p:txBody>
       </p:sp>
     </p:spTree>
     <p:extLst>
       <p:ext uri="{BB962C8B-B14F-4D97-AF65-F5344CB8AC3E}">
-        <p14:creationId xmlns:p14="http://schemas.microsoft.com/office/powerpoint/2010/main" val="1024086991"/>
+        <p14:creationId xmlns:p14="http://schemas.microsoft.com/office/powerpoint/2010/main" val="2148728831"/>
       </p:ext>
     </p:extLst>
   </p:cSld>
@@ -1869,15 +1963,17 @@
           <a:p>
             <a:r>
               <a:rPr lang="en-US" dirty="0"/>
-              <a:t>Six benefits. I will give one sentence for each.
-Work across teams. Your flight agent and their hotel agent do not need the same programming language.
-Less glue code. Without A2A, every new partner is a new project. With A2A, the partner publishes a card and you already know how to call it.
-Long jobs are normal. Booking a trip is not one click. A2A can stream status: still searching, need your passport number, done.
-Many kinds of content. Not only chat text. A form. A PDF. A table.
-Inner work stays home. This is a business benefit and a safety benefit. You do not hand over your secret process.
-Same safety steps. Your security team learns one pattern. They do not review a new private API every month.
-So again, A2A lets us work with agents we do not own, without opening our system.</a:t>
-            </a:r>
+              <a:t>This picture is the problem. The yellow box is your assistant. The user asked it to plan a trip. The assistant is good at talk, but it does not own flights, hotels, currency, or local tickets.
+Those four specialists live in other companies. They use other software. They have other rules. Today, with no shared standard, your team would build four private connections. Next year a fifth vendor appears, and you build again.
+Three extra problems hide here.
+First, people wrap an agent as a simple tool. A tool returns a number and stops. A real agent may need to ask: which dates? what budget? A tool cannot do that well.
+Second, custom links often skip login, or they put a password inside the message body. That is how leaks start.
+Third, there is no common job ticket. When something fails, your log and their log do not share an id. Nobody can find the same call.
+A2A exists to give those four boxes one shared path up to the assistant.</a:t>
+            </a:r>
+          </a:p>
+          <a:p>
+            <a:endParaRPr lang="en-US" dirty="0"/>
           </a:p>
         </p:txBody>
       </p:sp>
@@ -1898,7 +1994,7 @@
           <a:p>
             <a:fld id="{F7021451-1387-4CA6-816F-3879F97B5CBC}" type="slidenum">
               <a:rPr lang="en-US"/>
-              <a:t>13</a:t>
+              <a:t>12</a:t>
             </a:fld>
             <a:endParaRPr lang="en-US"/>
           </a:p>
@@ -10218,6 +10314,9 @@
                   <a:srgbClr val="0B0B0B"/>
                 </a:solidFill>
                 <a:effectLst/>
+                <a:highlight>
+                  <a:srgbClr val="FFFF00"/>
+                </a:highlight>
                 <a:latin typeface="anthropic-sans"/>
               </a:rPr>
               <a:t>A2A</a:t>
@@ -10870,7 +10969,7 @@
                 <a:ea typeface="Calibri" pitchFamily="34" charset="-122"/>
                 <a:cs typeface="Calibri" pitchFamily="34" charset="-120"/>
               </a:rPr>
-              <a:t>7.  How your team can start</a:t>
+              <a:t>7.  How to start a POC</a:t>
             </a:r>
             <a:endParaRPr lang="en-US" sz="2400" dirty="0"/>
           </a:p>
